--- a/lec-2026/assets/Monnot_Poster_v4.pptx
+++ b/lec-2026/assets/Monnot_Poster_v4.pptx
@@ -3726,7 +3726,7 @@
                 <a:ea typeface="Segoe UI"/>
                 <a:cs typeface="Segoe UI"/>
               </a:rPr>
-              <a:t>Six frozen prompt architectures were scored once on the 55-case development set against bars locked to the human interval (Agency ≥ .910; Others ≥ .805). Every prompt was disqualified on false positives. Agency PSA sat at .750–.798. Study 1 stays on the human composite. No test case was scored before those results were fixed.</a:t>
+              <a:t>Six frozen prompt architectures were scored once on the 55-case development set against bars locked to the human interval (Agency ≥ .910; Others ≥ .805). Every prompt was disqualified on false positives. Agency PSA sat at .750–.798. Study 1 stays on the human composite. No test case was scored before those results were fixed; one later 65-case look: Agency .81, Others .75–.77, still disqualified; 128 sealed.</a:t>
             </a:r>
           </a:p>
         </p:txBody>
